--- a/02_workflow orchestration framework.pptx
+++ b/02_workflow orchestration framework.pptx
@@ -6516,10 +6516,10 @@
       </p:sp>
       <p:sp>
         <p:nvSpPr>
-          <p:cNvPr id="39" name="TextBox 38">
+          <p:cNvPr id="2" name="TextBox 1">
             <a:extLst>
               <a:ext uri="{FF2B5EF4-FFF2-40B4-BE49-F238E27FC236}">
-                <a16:creationId xmlns:a16="http://schemas.microsoft.com/office/drawing/2014/main" id="{42FBA663-2A83-8D7E-3654-08E7B500B1D4}"/>
+                <a16:creationId xmlns:a16="http://schemas.microsoft.com/office/drawing/2014/main" id="{D9A3269E-DC11-EAA8-DC41-64E5F129BFBD}"/>
               </a:ext>
             </a:extLst>
           </p:cNvPr>
@@ -6528,8 +6528,8 @@
         </p:nvSpPr>
         <p:spPr>
           <a:xfrm>
-            <a:off x="9191625" y="736349"/>
-            <a:ext cx="2438400" cy="461665"/>
+            <a:off x="7029450" y="803024"/>
+            <a:ext cx="4572000" cy="369332"/>
           </a:xfrm>
           <a:prstGeom prst="rect">
             <a:avLst/>
@@ -6544,18 +6544,12 @@
           <a:p>
             <a:pPr algn="r"/>
             <a:r>
-              <a:rPr lang="en-US" altLang="ko-KR" sz="2400" b="1" dirty="0">
+              <a:rPr lang="en-US" altLang="ko-KR" b="1" dirty="0">
                 <a:latin typeface="Lora" pitchFamily="2" charset="0"/>
                 <a:ea typeface="Batang" panose="02030600000101010101" pitchFamily="18" charset="-127"/>
-                <a:cs typeface="+mj-cs"/>
-              </a:rPr>
-              <a:t>asset</a:t>
-            </a:r>
-            <a:endParaRPr lang="ko-KR" altLang="en-US" sz="2400" b="1" dirty="0">
-              <a:latin typeface="Lora" pitchFamily="2" charset="0"/>
-              <a:ea typeface="Batang" panose="02030600000101010101" pitchFamily="18" charset="-127"/>
-              <a:cs typeface="+mj-cs"/>
-            </a:endParaRPr>
+              </a:rPr>
+              <a:t>asset materialization</a:t>
+            </a:r>
           </a:p>
         </p:txBody>
       </p:sp>
